--- a/eval/samples/q1/slides.pptx
+++ b/eval/samples/q1/slides.pptx
@@ -586,7 +586,7 @@
           <a:lstStyle/>
           <a:p>
             <a:r>
-              <a:t>Знать, что такое переменная, тип данных, условие и цикл; Понятие 1 темы «Переменные и типы данных» — Ключевое понятие, которое объясняется на лекции простыми словами.; Понятие 2 темы «Переменные и типы данных» — Ключевое понятие, которое объясняется на лекции простыми словами.; Понятие 3 темы «Переменные и типы данных» — Ключевое понятие, которое объясняется на лекции простыми словами.</a:t>
+              <a:t>Подведите итоги: что теперь получается и какие вопросы остались; ответьте на вопросы.</a:t>
             </a:r>
           </a:p>
         </p:txBody>
@@ -866,7 +866,7 @@
           <a:lstStyle/>
           <a:p>
             <a:r>
-              <a:t>Знать, что такое переменная, тип данных, условие и цикл; Владеть навыком запуска и отладки простой программы; Понятие 1 темы «Первая программа: ввод и вывод» — Ключевое понятие, которое объясняется на лекции простыми словами.; Понятие 2 темы «Первая программа: ввод и вывод» — Ключевое понятие, которое объясняется на лекции простыми словами.; Понятие 3 темы «Первая программа: ввод и вывод» — Ключевое понятие, которое объясняется на лекции простыми словами.</a:t>
+              <a:t>Подведите итоги: что теперь получается и какие вопросы остались; ответьте на вопросы.</a:t>
             </a:r>
           </a:p>
         </p:txBody>
@@ -4169,7 +4169,7 @@
         </p:nvSpPr>
         <p:spPr>
           <a:xfrm>
-            <a:off x="731520" y="1828800"/>
+            <a:off x="731520" y="1097280"/>
             <a:ext cx="10698480" cy="1645920"/>
           </a:xfrm>
         </p:spPr>
@@ -4202,8 +4202,8 @@
         </p:nvSpPr>
         <p:spPr>
           <a:xfrm>
-            <a:off x="731520" y="3657600"/>
-            <a:ext cx="10698480" cy="1463040"/>
+            <a:off x="731520" y="2926080"/>
+            <a:ext cx="10698480" cy="3200400"/>
           </a:xfrm>
         </p:spPr>
         <p:txBody>
@@ -4243,6 +4243,54 @@
                 <a:latin typeface="Arial"/>
               </a:rPr>
               <a:t>Цель: Разобраться в теме «Первая программа: ввод и вывод» и подготовиться к практике.</a:t>
+            </a:r>
+          </a:p>
+          <a:p>
+            <a:pPr algn="l"/>
+            <a:r>
+              <a:rPr sz="1600" b="0">
+                <a:solidFill>
+                  <a:srgbClr val="222222"/>
+                </a:solidFill>
+                <a:latin typeface="Arial"/>
+              </a:rPr>
+              <a:t>План лекции:</a:t>
+            </a:r>
+          </a:p>
+          <a:p>
+            <a:pPr algn="l"/>
+            <a:r>
+              <a:rPr sz="1500" b="0">
+                <a:solidFill>
+                  <a:srgbClr val="222222"/>
+                </a:solidFill>
+                <a:latin typeface="Arial"/>
+              </a:rPr>
+              <a:t>1. Введение в тему (Первая программа: ввод и вывод)</a:t>
+            </a:r>
+          </a:p>
+          <a:p>
+            <a:pPr algn="l"/>
+            <a:r>
+              <a:rPr sz="1500" b="0">
+                <a:solidFill>
+                  <a:srgbClr val="222222"/>
+                </a:solidFill>
+                <a:latin typeface="Arial"/>
+              </a:rPr>
+              <a:t>2. Основные приёмы (Первая программа: ввод и вывод)</a:t>
+            </a:r>
+          </a:p>
+          <a:p>
+            <a:pPr algn="l"/>
+            <a:r>
+              <a:rPr sz="1500" b="0">
+                <a:solidFill>
+                  <a:srgbClr val="222222"/>
+                </a:solidFill>
+                <a:latin typeface="Arial"/>
+              </a:rPr>
+              <a:t>3. Применение на практике (Первая программа: ввод и вывод)</a:t>
             </a:r>
           </a:p>
         </p:txBody>
@@ -5875,7 +5923,7 @@
         </p:nvSpPr>
         <p:spPr>
           <a:xfrm>
-            <a:off x="731520" y="1828800"/>
+            <a:off x="731520" y="1097280"/>
             <a:ext cx="10698480" cy="1645920"/>
           </a:xfrm>
         </p:spPr>
@@ -5908,8 +5956,8 @@
         </p:nvSpPr>
         <p:spPr>
           <a:xfrm>
-            <a:off x="731520" y="3657600"/>
-            <a:ext cx="10698480" cy="1463040"/>
+            <a:off x="731520" y="2926080"/>
+            <a:ext cx="10698480" cy="3200400"/>
           </a:xfrm>
         </p:spPr>
         <p:txBody>
@@ -5949,6 +5997,54 @@
                 <a:latin typeface="Arial"/>
               </a:rPr>
               <a:t>Цель: Разобраться в теме «Переменные и типы данных» и подготовиться к практике.</a:t>
+            </a:r>
+          </a:p>
+          <a:p>
+            <a:pPr algn="l"/>
+            <a:r>
+              <a:rPr sz="1600" b="0">
+                <a:solidFill>
+                  <a:srgbClr val="222222"/>
+                </a:solidFill>
+                <a:latin typeface="Arial"/>
+              </a:rPr>
+              <a:t>План лекции:</a:t>
+            </a:r>
+          </a:p>
+          <a:p>
+            <a:pPr algn="l"/>
+            <a:r>
+              <a:rPr sz="1500" b="0">
+                <a:solidFill>
+                  <a:srgbClr val="222222"/>
+                </a:solidFill>
+                <a:latin typeface="Arial"/>
+              </a:rPr>
+              <a:t>1. Введение в тему (Переменные и типы данных)</a:t>
+            </a:r>
+          </a:p>
+          <a:p>
+            <a:pPr algn="l"/>
+            <a:r>
+              <a:rPr sz="1500" b="0">
+                <a:solidFill>
+                  <a:srgbClr val="222222"/>
+                </a:solidFill>
+                <a:latin typeface="Arial"/>
+              </a:rPr>
+              <a:t>2. Основные приёмы (Переменные и типы данных)</a:t>
+            </a:r>
+          </a:p>
+          <a:p>
+            <a:pPr algn="l"/>
+            <a:r>
+              <a:rPr sz="1500" b="0">
+                <a:solidFill>
+                  <a:srgbClr val="222222"/>
+                </a:solidFill>
+                <a:latin typeface="Arial"/>
+              </a:rPr>
+              <a:t>3. Применение на практике (Переменные и типы данных)</a:t>
             </a:r>
           </a:p>
         </p:txBody>
